--- a/decks/englang-rhetoric/englang-rhetoric_ch5_introduction-ethos-logos.pptx
+++ b/decks/englang-rhetoric/englang-rhetoric_ch5_introduction-ethos-logos.pptx
@@ -126,29 +126,29 @@
   <p:extLst>
     <p:ext uri="{521415D9-36F7-43E2-AB2F-B90AF26B5E84}">
       <p14:sectionLst xmlns:p14="http://schemas.microsoft.com/office/powerpoint/2010/main">
-        <p14:section name="Opening" id="{645cab68-8555-7449-b883-273b5abd63d0}">
+        <p14:section name="Opening" id="{2e0b27bf-4089-6feb-cd8a-9291c3818118}">
           <p14:sldIdLst>
             <p14:sldId id="256"/>
           </p14:sldIdLst>
         </p14:section>
-        <p14:section name="Gate" id="{e6db88ff-cf21-ee09-3c80-387289f8779c}">
+        <p14:section name="Gate" id="{21c1238d-41ff-fb44-48d8-21d68fd374e5}">
           <p14:sldIdLst>
             <p14:sldId id="257"/>
             <p14:sldId id="258"/>
           </p14:sldIdLst>
         </p14:section>
-        <p14:section name="Pre-teach" id="{1f11eec8-a37d-759d-d988-fb04a8ecd8bb}">
+        <p14:section name="Pre-teach" id="{19f38c46-afef-d241-6438-b7aef7bc89c4}">
           <p14:sldIdLst>
             <p14:sldId id="259"/>
           </p14:sldIdLst>
         </p14:section>
-        <p14:section name="Read-along" id="{83a2f108-329b-df6a-d50e-fb3f32e3aee8}">
+        <p14:section name="Read-along" id="{8ea3e172-5125-eb87-fa1b-d50f90050da0}">
           <p14:sldIdLst>
             <p14:sldId id="260"/>
             <p14:sldId id="261"/>
           </p14:sldIdLst>
         </p14:section>
-        <p14:section name="Teach" id="{e9bd8741-185a-a6e4-16d6-664f66e15c95}">
+        <p14:section name="Teach" id="{bd87193e-383d-d546-f949-84f52bec6058}">
           <p14:sldIdLst>
             <p14:sldId id="262"/>
             <p14:sldId id="263"/>
@@ -158,7 +158,7 @@
             <p14:sldId id="267"/>
           </p14:sldIdLst>
         </p14:section>
-        <p14:section name="Routes" id="{86bac4ca-27c5-c261-fb92-b74f501e4492}">
+        <p14:section name="Routes" id="{e24db33f-1a68-9b97-6532-b49906c84e4a}">
           <p14:sldIdLst>
             <p14:sldId id="268"/>
             <p14:sldId id="269"/>
@@ -166,12 +166,12 @@
             <p14:sldId id="271"/>
           </p14:sldIdLst>
         </p14:section>
-        <p14:section name="Close" id="{fe91455d-a2c4-96f2-3b03-97345fa2fe72}">
+        <p14:section name="Close" id="{d81dddf4-6c57-5928-db1b-f224222629e3}">
           <p14:sldIdLst>
             <p14:sldId id="272"/>
           </p14:sldIdLst>
         </p14:section>
-        <p14:section name="Answers" id="{bb88cb8d-5fae-d7fd-2c76-420b63572632}">
+        <p14:section name="Answers" id="{ff74cb6e-f54e-c4b0-f9f3-257ddfd0e054}">
           <p14:sldIdLst>
             <p14:sldId id="273"/>
             <p14:sldId id="274"/>
@@ -1330,7 +1330,7 @@
               <a:rPr lang="en-US" dirty="0"/>
               <a:t>Exit ticket — individual, silent, on a slip or mini-whiteboard. Recall before help: no notes, no lanes, no hints. Collect before pupils leave.
 Question: In the six-part structure, which part comes straight after the introduction?
-Answer: D   Ethos. Introduction, ethos, argument one (logos), counterargument, argument two (pathos), conclusion.
+Answer: A   Ethos. Introduction, ethos, argument one (logos), counterargument, argument two (pathos), conclusion.
 Source of this question: gate item 1 re-asked (options rotated) — this chapter has no third quick-check module.
 The ebook also holds task 3, "Write your logos argument", for homework or the next lesson's do now.
 Sort the slips: correct → ready to move on; incorrect → start next lesson in the pre-teach group, with the read-along and the Support lane. Same destination next time.</a:t>
@@ -1606,9 +1606,9 @@
             <a:r>
               <a:rPr lang="en-US" dirty="0"/>
               <a:t>Do now — retrieval. Silent, no notes, no help: recall comes before any support. Give about four minutes.
-1. In the six-part structure, which part comes straight after the introduction?  →  A   Ethos
+1. In the six-part structure, which part comes straight after the introduction?  →  B   Ethos
 2. Your first argument should use ___ to make your point clear and logical.  →  logos
-3. Which sentence from the model speech is the clearest example of logos?  →  A   “last winter it recorded unsafe levels on sixty-three days”
+3. Which sentence from the model speech is the clearest example of logos?  →  B   “last winter it recorded unsafe levels on sixty-three days”
 Circulate: who gets 3/3 (Stretch route), 2/3 (Core), 0–1 (Support)? Use this to route pupils later in the lesson.</a:t>
             </a:r>
             <a:endParaRPr lang="en-US" dirty="0"/>
@@ -1698,7 +1698,7 @@
             <a:r>
               <a:rPr lang="en-US" dirty="0"/>
               <a:t>Answers — exit ticket: Exit ticket. Reveal the answer; pupils mark their own work in a different colour, then read the "why" together. Same destination for every lane, so one answer serves the whole class.
-Answer: D   Ethos
+Answer: A   Ethos
 Why: Introduction, ethos, argument one (logos), counterargument, argument two (pathos), conclusion.
 Ask a Support pupil to explain one step, and a Stretch pupil to share their extension.</a:t>
             </a:r>
@@ -1789,9 +1789,9 @@
             <a:r>
               <a:rPr lang="en-US" dirty="0"/>
               <a:t>Answers — pupils mark their own in a different colour, then hands up for 3/3, 2/3, 1/3.
-1. A   Ethos. Introduction, ethos, argument one (logos), counterargument, argument two (pathos), conclusion.
+1. B   Ethos. Introduction, ethos, argument one (logos), counterargument, argument two (pathos), conclusion.
 2. logos. Argument one is built on logos: facts, statistics and a clear line of reasoning.
-3. A   “last winter it recorded unsafe levels on sixty-three days”. A counted number from the town’s air monitor is checkable proof: logos.
+3. B   “last winter it recorded unsafe levels on sixty-three days”. A counted number from the town’s air monitor is checkable proof: logos.
 Say the route each score points to: 3/3 Stretch, 2/3 Core, 0–1 Support. Pupils may choose to move up.</a:t>
             </a:r>
             <a:endParaRPr lang="en-US" dirty="0"/>
@@ -8915,7 +8915,7 @@
                 <a:ea typeface="Calibri" pitchFamily="34" charset="-122"/>
                 <a:cs typeface="Calibri" pitchFamily="34" charset="-120"/>
               </a:rPr>
-              <a:t>Counterargument</a:t>
+              <a:t>Ethos</a:t>
             </a:r>
             <a:endParaRPr lang="en-US" sz="2400" dirty="0"/>
           </a:p>
@@ -8952,7 +8952,7 @@
                 <a:ea typeface="Calibri" pitchFamily="34" charset="-122"/>
                 <a:cs typeface="Calibri" pitchFamily="34" charset="-120"/>
               </a:rPr>
-              <a:t>Conclusion</a:t>
+              <a:t>Argument two (pathos)</a:t>
             </a:r>
             <a:endParaRPr lang="en-US" sz="2400" dirty="0"/>
           </a:p>
@@ -8989,7 +8989,7 @@
                 <a:ea typeface="Calibri" pitchFamily="34" charset="-122"/>
                 <a:cs typeface="Calibri" pitchFamily="34" charset="-120"/>
               </a:rPr>
-              <a:t>Argument two (pathos)</a:t>
+              <a:t>Counterargument</a:t>
             </a:r>
             <a:endParaRPr lang="en-US" sz="2400" dirty="0"/>
           </a:p>
@@ -9026,7 +9026,7 @@
                 <a:ea typeface="Calibri" pitchFamily="34" charset="-122"/>
                 <a:cs typeface="Calibri" pitchFamily="34" charset="-120"/>
               </a:rPr>
-              <a:t>Ethos</a:t>
+              <a:t>Conclusion</a:t>
             </a:r>
             <a:endParaRPr lang="en-US" sz="2400" dirty="0"/>
           </a:p>
@@ -10938,7 +10938,7 @@
                 <a:ea typeface="Calibri" pitchFamily="34" charset="-122"/>
                 <a:cs typeface="Calibri" pitchFamily="34" charset="-120"/>
               </a:rPr>
-              <a:t>Ethos</a:t>
+              <a:t>Conclusion</a:t>
             </a:r>
             <a:endParaRPr lang="en-US" sz="1800" dirty="0"/>
           </a:p>
@@ -10975,7 +10975,7 @@
                 <a:ea typeface="Calibri" pitchFamily="34" charset="-122"/>
                 <a:cs typeface="Calibri" pitchFamily="34" charset="-120"/>
               </a:rPr>
-              <a:t>Counterargument</a:t>
+              <a:t>Ethos</a:t>
             </a:r>
             <a:endParaRPr lang="en-US" sz="1800" dirty="0"/>
           </a:p>
@@ -11012,7 +11012,7 @@
                 <a:ea typeface="Calibri" pitchFamily="34" charset="-122"/>
                 <a:cs typeface="Calibri" pitchFamily="34" charset="-120"/>
               </a:rPr>
-              <a:t>Conclusion</a:t>
+              <a:t>Argument two (pathos)</a:t>
             </a:r>
             <a:endParaRPr lang="en-US" sz="1800" dirty="0"/>
           </a:p>
@@ -11049,7 +11049,7 @@
                 <a:ea typeface="Calibri" pitchFamily="34" charset="-122"/>
                 <a:cs typeface="Calibri" pitchFamily="34" charset="-120"/>
               </a:rPr>
-              <a:t>Argument two (pathos)</a:t>
+              <a:t>Counterargument</a:t>
             </a:r>
             <a:endParaRPr lang="en-US" sz="1800" dirty="0"/>
           </a:p>
@@ -11451,7 +11451,7 @@
                 <a:ea typeface="Calibri" pitchFamily="34" charset="-122"/>
                 <a:cs typeface="Calibri" pitchFamily="34" charset="-120"/>
               </a:rPr>
-              <a:t>“last winter it recorded unsafe levels on sixty-three days”</a:t>
+              <a:t>“Good evening, Hollowmere.”</a:t>
             </a:r>
             <a:endParaRPr lang="en-US" sz="2000" dirty="0"/>
           </a:p>
@@ -11488,7 +11488,7 @@
                 <a:ea typeface="Calibri" pitchFamily="34" charset="-122"/>
                 <a:cs typeface="Calibri" pitchFamily="34" charset="-120"/>
               </a:rPr>
-              <a:t>“Imagine walking your child to school without checking the pollution app first.”</a:t>
+              <a:t>“last winter it recorded unsafe levels on sixty-three days”</a:t>
             </a:r>
             <a:endParaRPr lang="en-US" sz="2000" dirty="0"/>
           </a:p>
@@ -11525,7 +11525,7 @@
                 <a:ea typeface="Calibri" pitchFamily="34" charset="-122"/>
                 <a:cs typeface="Calibri" pitchFamily="34" charset="-120"/>
               </a:rPr>
-              <a:t>“I am a pupil who has done the work”</a:t>
+              <a:t>“Imagine walking your child to school without checking the pollution app first.”</a:t>
             </a:r>
             <a:endParaRPr lang="en-US" sz="2000" dirty="0"/>
           </a:p>
@@ -11562,7 +11562,7 @@
                 <a:ea typeface="Calibri" pitchFamily="34" charset="-122"/>
                 <a:cs typeface="Calibri" pitchFamily="34" charset="-120"/>
               </a:rPr>
-              <a:t>“Good evening, Hollowmere.”</a:t>
+              <a:t>“I am a pupil who has done the work”</a:t>
             </a:r>
             <a:endParaRPr lang="en-US" sz="2000" dirty="0"/>
           </a:p>
@@ -11901,7 +11901,7 @@
                 <a:ea typeface="Cambria" pitchFamily="34" charset="-122"/>
                 <a:cs typeface="Cambria" pitchFamily="34" charset="-120"/>
               </a:rPr>
-              <a:t>D   Ethos</a:t>
+              <a:t>A   Ethos</a:t>
             </a:r>
             <a:endParaRPr lang="en-US" sz="1800" dirty="0"/>
           </a:p>
@@ -12422,7 +12422,7 @@
                 <a:ea typeface="Calibri" pitchFamily="34" charset="-122"/>
                 <a:cs typeface="Calibri" pitchFamily="34" charset="-120"/>
               </a:rPr>
-              <a:t>A   Ethos</a:t>
+              <a:t>B   Ethos</a:t>
             </a:r>
             <a:endParaRPr lang="en-US" sz="2200" dirty="0"/>
           </a:p>
@@ -12922,7 +12922,7 @@
                 <a:ea typeface="Calibri" pitchFamily="34" charset="-122"/>
                 <a:cs typeface="Calibri" pitchFamily="34" charset="-120"/>
               </a:rPr>
-              <a:t>A   “last winter it recorded unsafe levels on sixty-three days”</a:t>
+              <a:t>B   “last winter it recorded unsafe levels on sixty-three days”</a:t>
             </a:r>
             <a:endParaRPr lang="en-US" sz="2200" dirty="0"/>
           </a:p>

--- a/decks/englang-rhetoric/englang-rhetoric_ch5_introduction-ethos-logos.pptx
+++ b/decks/englang-rhetoric/englang-rhetoric_ch5_introduction-ethos-logos.pptx
@@ -126,29 +126,29 @@
   <p:extLst>
     <p:ext uri="{521415D9-36F7-43E2-AB2F-B90AF26B5E84}">
       <p14:sectionLst xmlns:p14="http://schemas.microsoft.com/office/powerpoint/2010/main">
-        <p14:section name="Opening" id="{2e0b27bf-4089-6feb-cd8a-9291c3818118}">
+        <p14:section name="Opening" id="{d98a5381-1eaa-5f56-0ccf-1f631e48253c}">
           <p14:sldIdLst>
             <p14:sldId id="256"/>
           </p14:sldIdLst>
         </p14:section>
-        <p14:section name="Gate" id="{21c1238d-41ff-fb44-48d8-21d68fd374e5}">
+        <p14:section name="Gate" id="{2393c33a-a1c7-dbee-62a4-f35e7c66cb64}">
           <p14:sldIdLst>
             <p14:sldId id="257"/>
             <p14:sldId id="258"/>
           </p14:sldIdLst>
         </p14:section>
-        <p14:section name="Pre-teach" id="{19f38c46-afef-d241-6438-b7aef7bc89c4}">
+        <p14:section name="Pre-teach" id="{9820760c-2edb-d6a9-9d35-2a3ef30a15bd}">
           <p14:sldIdLst>
             <p14:sldId id="259"/>
           </p14:sldIdLst>
         </p14:section>
-        <p14:section name="Read-along" id="{8ea3e172-5125-eb87-fa1b-d50f90050da0}">
+        <p14:section name="Read-along" id="{cbca12a1-2561-3ceb-a8e2-455035254452}">
           <p14:sldIdLst>
             <p14:sldId id="260"/>
             <p14:sldId id="261"/>
           </p14:sldIdLst>
         </p14:section>
-        <p14:section name="Teach" id="{bd87193e-383d-d546-f949-84f52bec6058}">
+        <p14:section name="Teach" id="{d6fe7a07-e661-89f8-734a-4262dad99bfe}">
           <p14:sldIdLst>
             <p14:sldId id="262"/>
             <p14:sldId id="263"/>
@@ -158,7 +158,7 @@
             <p14:sldId id="267"/>
           </p14:sldIdLst>
         </p14:section>
-        <p14:section name="Routes" id="{e24db33f-1a68-9b97-6532-b49906c84e4a}">
+        <p14:section name="Routes" id="{72d13c5f-42c9-8566-6e62-a15105061a59}">
           <p14:sldIdLst>
             <p14:sldId id="268"/>
             <p14:sldId id="269"/>
@@ -166,12 +166,12 @@
             <p14:sldId id="271"/>
           </p14:sldIdLst>
         </p14:section>
-        <p14:section name="Close" id="{d81dddf4-6c57-5928-db1b-f224222629e3}">
+        <p14:section name="Close" id="{28f7a109-b328-17fe-f827-52f3948c720f}">
           <p14:sldIdLst>
             <p14:sldId id="272"/>
           </p14:sldIdLst>
         </p14:section>
-        <p14:section name="Answers" id="{ff74cb6e-f54e-c4b0-f9f3-257ddfd0e054}">
+        <p14:section name="Answers" id="{6021a50f-b128-d9d3-86d6-d6c31d107226}">
           <p14:sldIdLst>
             <p14:sldId id="273"/>
             <p14:sldId id="274"/>
